--- a/docs/사업계획서/2026-10_스마트경찰경광등_사업계획_과제제안.pptx
+++ b/docs/사업계획서/2026-10_스마트경찰경광등_사업계획_과제제안.pptx
@@ -4,12 +4,9 @@
   <p:sldMasterIdLst>
     <p:sldMasterId id="2147483648" r:id="rId1"/>
   </p:sldMasterIdLst>
-  <p:notesMasterIdLst>
-    <p:notesMasterId r:id="rId4"/>
-  </p:notesMasterIdLst>
   <p:sldIdLst>
     <p:sldId id="256" r:id="rId2"/>
-    <p:sldId id="257" r:id="rId3"/>
+    <p:sldId id="257" r:id="rId8"/>
     <p:sldId id="258" r:id="rId9"/>
     <p:sldId id="259" r:id="rId10"/>
     <p:sldId id="260" r:id="rId11"/>
@@ -1098,7 +1095,7 @@
 </file>
 
 <file path=ppt/notesMasters/notesMaster1.xml><?xml version="1.0" encoding="utf-8"?>
-<p:notesMaster xmlns:a="http://schemas.openxmlformats.org/drawingml/2006/main" xmlns:r="http://schemas.openxmlformats.org/officeDocument/2006/relationships" xmlns:p="http://schemas.openxmlformats.org/presentationml/2006/main">
+<p:notesMaster xmlns:a="http://schemas.openxmlformats.org/drawingml/2006/main" xmlns:p="http://schemas.openxmlformats.org/presentationml/2006/main" xmlns:r="http://schemas.openxmlformats.org/officeDocument/2006/relationships">
   <p:cSld>
     <p:bg>
       <p:bgRef idx="1001">
@@ -1132,7 +1129,7 @@
         <p:spPr>
           <a:xfrm>
             <a:off x="0" y="0"/>
-            <a:ext cx="3076575" cy="512763"/>
+            <a:ext cx="2971800" cy="457200"/>
           </a:xfrm>
           <a:prstGeom prst="rect">
             <a:avLst/>
@@ -1162,8 +1159,8 @@
         </p:nvSpPr>
         <p:spPr>
           <a:xfrm>
-            <a:off x="4021138" y="0"/>
-            <a:ext cx="3076575" cy="512763"/>
+            <a:off x="3884613" y="0"/>
+            <a:ext cx="2971800" cy="457200"/>
           </a:xfrm>
           <a:prstGeom prst="rect">
             <a:avLst/>
@@ -1177,9 +1174,9 @@
             </a:lvl1pPr>
           </a:lstStyle>
           <a:p>
-            <a:fld id="{95F879F0-62C8-0241-8FA0-64324D0D3BA1}" type="datetimeFigureOut">
+            <a:fld id="{0F89C1C7-3DCD-1040-A9CF-14679D8B5DDD}" type="datetimeFigureOut">
               <a:rPr lang="en-US" smtClean="0"/>
-              <a:t>2026. 10. 6.</a:t>
+              <a:t>26/10/06</a:t>
             </a:fld>
             <a:endParaRPr lang="en-US"/>
           </a:p>
@@ -1197,8 +1194,8 @@
         </p:nvSpPr>
         <p:spPr>
           <a:xfrm>
-            <a:off x="479425" y="1279525"/>
-            <a:ext cx="6140450" cy="3454400"/>
+            <a:off x="1143000" y="685800"/>
+            <a:ext cx="4572000" cy="3429000"/>
           </a:xfrm>
           <a:prstGeom prst="rect">
             <a:avLst/>
@@ -1230,8 +1227,8 @@
         </p:nvSpPr>
         <p:spPr>
           <a:xfrm>
-            <a:off x="709613" y="4926013"/>
-            <a:ext cx="5680075" cy="4029075"/>
+            <a:off x="685800" y="4343400"/>
+            <a:ext cx="5486400" cy="4114800"/>
           </a:xfrm>
           <a:prstGeom prst="rect">
             <a:avLst/>
@@ -1243,37 +1240,38 @@
           <a:p>
             <a:pPr lvl="0"/>
             <a:r>
-              <a:rPr lang="en-US"/>
+              <a:rPr lang="en-US" smtClean="0"/>
               <a:t>Click to edit Master text styles</a:t>
             </a:r>
           </a:p>
           <a:p>
             <a:pPr lvl="1"/>
             <a:r>
-              <a:rPr lang="en-US"/>
+              <a:rPr lang="en-US" smtClean="0"/>
               <a:t>Second level</a:t>
             </a:r>
           </a:p>
           <a:p>
             <a:pPr lvl="2"/>
             <a:r>
-              <a:rPr lang="en-US"/>
+              <a:rPr lang="en-US" smtClean="0"/>
               <a:t>Third level</a:t>
             </a:r>
           </a:p>
           <a:p>
             <a:pPr lvl="3"/>
             <a:r>
-              <a:rPr lang="en-US"/>
+              <a:rPr lang="en-US" smtClean="0"/>
               <a:t>Fourth level</a:t>
             </a:r>
           </a:p>
           <a:p>
             <a:pPr lvl="4"/>
             <a:r>
-              <a:rPr lang="en-US"/>
+              <a:rPr lang="en-US" smtClean="0"/>
               <a:t>Fifth level</a:t>
             </a:r>
+            <a:endParaRPr lang="en-US"/>
           </a:p>
         </p:txBody>
       </p:sp>
@@ -1289,8 +1287,8 @@
         </p:nvSpPr>
         <p:spPr>
           <a:xfrm>
-            <a:off x="0" y="9721850"/>
-            <a:ext cx="3076575" cy="512763"/>
+            <a:off x="0" y="8685213"/>
+            <a:ext cx="2971800" cy="457200"/>
           </a:xfrm>
           <a:prstGeom prst="rect">
             <a:avLst/>
@@ -1320,8 +1318,8 @@
         </p:nvSpPr>
         <p:spPr>
           <a:xfrm>
-            <a:off x="4021138" y="9721850"/>
-            <a:ext cx="3076575" cy="512763"/>
+            <a:off x="3884613" y="8685213"/>
+            <a:ext cx="2971800" cy="457200"/>
           </a:xfrm>
           <a:prstGeom prst="rect">
             <a:avLst/>
@@ -1335,7 +1333,7 @@
             </a:lvl1pPr>
           </a:lstStyle>
           <a:p>
-            <a:fld id="{4F8ADD7C-DB73-9E43-B3F1-6DBC99238BDC}" type="slidenum">
+            <a:fld id="{BB5E49A5-4136-284D-997B-48E1D791AD67}" type="slidenum">
               <a:rPr lang="en-US" smtClean="0"/>
               <a:t>‹#›</a:t>
             </a:fld>
@@ -1346,13 +1344,13 @@
     </p:spTree>
     <p:extLst>
       <p:ext uri="{BB962C8B-B14F-4D97-AF65-F5344CB8AC3E}">
-        <p14:creationId xmlns:p14="http://schemas.microsoft.com/office/powerpoint/2010/main" val="2557674104"/>
+        <p14:creationId xmlns:p14="http://schemas.microsoft.com/office/powerpoint/2010/main" val="2623252185"/>
       </p:ext>
     </p:extLst>
   </p:cSld>
   <p:clrMap bg1="lt1" tx1="dk1" bg2="lt2" tx2="dk2" accent1="accent1" accent2="accent2" accent3="accent3" accent4="accent4" accent5="accent5" accent6="accent6" hlink="hlink" folHlink="folHlink"/>
   <p:notesStyle>
-    <a:lvl1pPr marL="0" algn="l" defTabSz="914400" rtl="0" eaLnBrk="1" latinLnBrk="0" hangingPunct="1">
+    <a:lvl1pPr marL="0" algn="l" defTabSz="457200" rtl="0" eaLnBrk="1" latinLnBrk="0" hangingPunct="1">
       <a:defRPr sz="1200" kern="1200">
         <a:solidFill>
           <a:schemeClr val="tx1"/>
@@ -1362,7 +1360,7 @@
         <a:cs typeface="+mn-cs"/>
       </a:defRPr>
     </a:lvl1pPr>
-    <a:lvl2pPr marL="457200" algn="l" defTabSz="914400" rtl="0" eaLnBrk="1" latinLnBrk="0" hangingPunct="1">
+    <a:lvl2pPr marL="457200" algn="l" defTabSz="457200" rtl="0" eaLnBrk="1" latinLnBrk="0" hangingPunct="1">
       <a:defRPr sz="1200" kern="1200">
         <a:solidFill>
           <a:schemeClr val="tx1"/>
@@ -1372,7 +1370,7 @@
         <a:cs typeface="+mn-cs"/>
       </a:defRPr>
     </a:lvl2pPr>
-    <a:lvl3pPr marL="914400" algn="l" defTabSz="914400" rtl="0" eaLnBrk="1" latinLnBrk="0" hangingPunct="1">
+    <a:lvl3pPr marL="914400" algn="l" defTabSz="457200" rtl="0" eaLnBrk="1" latinLnBrk="0" hangingPunct="1">
       <a:defRPr sz="1200" kern="1200">
         <a:solidFill>
           <a:schemeClr val="tx1"/>
@@ -1382,7 +1380,7 @@
         <a:cs typeface="+mn-cs"/>
       </a:defRPr>
     </a:lvl3pPr>
-    <a:lvl4pPr marL="1371600" algn="l" defTabSz="914400" rtl="0" eaLnBrk="1" latinLnBrk="0" hangingPunct="1">
+    <a:lvl4pPr marL="1371600" algn="l" defTabSz="457200" rtl="0" eaLnBrk="1" latinLnBrk="0" hangingPunct="1">
       <a:defRPr sz="1200" kern="1200">
         <a:solidFill>
           <a:schemeClr val="tx1"/>
@@ -1392,7 +1390,7 @@
         <a:cs typeface="+mn-cs"/>
       </a:defRPr>
     </a:lvl4pPr>
-    <a:lvl5pPr marL="1828800" algn="l" defTabSz="914400" rtl="0" eaLnBrk="1" latinLnBrk="0" hangingPunct="1">
+    <a:lvl5pPr marL="1828800" algn="l" defTabSz="457200" rtl="0" eaLnBrk="1" latinLnBrk="0" hangingPunct="1">
       <a:defRPr sz="1200" kern="1200">
         <a:solidFill>
           <a:schemeClr val="tx1"/>
@@ -1402,7 +1400,7 @@
         <a:cs typeface="+mn-cs"/>
       </a:defRPr>
     </a:lvl5pPr>
-    <a:lvl6pPr marL="2286000" algn="l" defTabSz="914400" rtl="0" eaLnBrk="1" latinLnBrk="0" hangingPunct="1">
+    <a:lvl6pPr marL="2286000" algn="l" defTabSz="457200" rtl="0" eaLnBrk="1" latinLnBrk="0" hangingPunct="1">
       <a:defRPr sz="1200" kern="1200">
         <a:solidFill>
           <a:schemeClr val="tx1"/>
@@ -1412,7 +1410,7 @@
         <a:cs typeface="+mn-cs"/>
       </a:defRPr>
     </a:lvl6pPr>
-    <a:lvl7pPr marL="2743200" algn="l" defTabSz="914400" rtl="0" eaLnBrk="1" latinLnBrk="0" hangingPunct="1">
+    <a:lvl7pPr marL="2743200" algn="l" defTabSz="457200" rtl="0" eaLnBrk="1" latinLnBrk="0" hangingPunct="1">
       <a:defRPr sz="1200" kern="1200">
         <a:solidFill>
           <a:schemeClr val="tx1"/>
@@ -1422,7 +1420,7 @@
         <a:cs typeface="+mn-cs"/>
       </a:defRPr>
     </a:lvl7pPr>
-    <a:lvl8pPr marL="3200400" algn="l" defTabSz="914400" rtl="0" eaLnBrk="1" latinLnBrk="0" hangingPunct="1">
+    <a:lvl8pPr marL="3200400" algn="l" defTabSz="457200" rtl="0" eaLnBrk="1" latinLnBrk="0" hangingPunct="1">
       <a:defRPr sz="1200" kern="1200">
         <a:solidFill>
           <a:schemeClr val="tx1"/>
@@ -1432,7 +1430,7 @@
         <a:cs typeface="+mn-cs"/>
       </a:defRPr>
     </a:lvl8pPr>
-    <a:lvl9pPr marL="3657600" algn="l" defTabSz="914400" rtl="0" eaLnBrk="1" latinLnBrk="0" hangingPunct="1">
+    <a:lvl9pPr marL="3657600" algn="l" defTabSz="457200" rtl="0" eaLnBrk="1" latinLnBrk="0" hangingPunct="1">
       <a:defRPr sz="1200" kern="1200">
         <a:solidFill>
           <a:schemeClr val="tx1"/>
@@ -3521,7 +3519,7 @@
             <a:fld id="{26494E1C-0098-483A-A815-468AA69CD83A}" type="datetimeFigureOut">
               <a:rPr lang="ko-KR" altLang="en-US" smtClean="0"/>
               <a:pPr/>
-              <a:t>2026. 10. 6.</a:t>
+              <a:t>2026-10-06</a:t>
             </a:fld>
             <a:endParaRPr lang="ko-KR" altLang="en-US" dirty="0"/>
           </a:p>
@@ -3611,7 +3609,7 @@
             <a:fld id="{26494E1C-0098-483A-A815-468AA69CD83A}" type="datetimeFigureOut">
               <a:rPr lang="ko-KR" altLang="en-US" smtClean="0"/>
               <a:pPr/>
-              <a:t>2026. 10. 6.</a:t>
+              <a:t>2026-10-06</a:t>
             </a:fld>
             <a:endParaRPr lang="ko-KR" altLang="en-US" dirty="0"/>
           </a:p>
@@ -3985,7 +3983,7 @@
             <a:fld id="{26494E1C-0098-483A-A815-468AA69CD83A}" type="datetimeFigureOut">
               <a:rPr lang="ko-KR" altLang="en-US" smtClean="0"/>
               <a:pPr/>
-              <a:t>2026. 10. 6.</a:t>
+              <a:t>2026-10-06</a:t>
             </a:fld>
             <a:endParaRPr lang="ko-KR" altLang="en-US" dirty="0"/>
           </a:p>
@@ -4427,10 +4425,14 @@
           <a:lstStyle/>
           <a:p>
             <a:r>
-              <a:rPr lang="en-US" altLang="ko-KR" dirty="0"/>
+              <a:rPr lang="ko-KR">
+                <a:latin typeface="Noto Sans KR"/>
+                <a:ea typeface="Noto Sans KR"/>
+                <a:cs typeface="Noto Sans KR"/>
+              </a:rPr>
               <a:t>스마트 경찰 경광등 사업계획 및 R&amp;D 과제 제안</a:t>
             </a:r>
-            <a:endParaRPr lang="en-US" dirty="0"/>
+            <a:endParaRPr lang="en-US"/>
           </a:p>
         </p:txBody>
       </p:sp>
@@ -4450,16 +4452,25 @@
           <a:lstStyle/>
           <a:p>
             <a:r>
-              <a:rPr lang="en-US" altLang="ko-KR" dirty="0"/>
+              <a:rPr lang="ko-KR" altLang="ko-KR">
+                <a:latin typeface="Noto Sans KR"/>
+                <a:ea typeface="Noto Sans KR"/>
+                <a:cs typeface="Noto Sans KR"/>
+              </a:rPr>
               <a:t>26/10/06</a:t>
             </a:r>
+            <a:endParaRPr lang="en-US" altLang="ko-KR" dirty="0"/>
           </a:p>
           <a:p>
             <a:endParaRPr lang="en-US" altLang="ko-KR" dirty="0"/>
           </a:p>
           <a:p>
             <a:r>
-              <a:rPr lang="ko-KR" altLang="en-US" dirty="0"/>
+              <a:rPr lang="ko-KR" altLang="en-US" dirty="0">
+                <a:latin typeface="Noto Sans KR"/>
+                <a:ea typeface="Noto Sans KR"/>
+                <a:cs typeface="Noto Sans KR"/>
+              </a:rPr>
               <a:t>엠클라비스㈜</a:t>
             </a:r>
           </a:p>
@@ -30148,44 +30159,44 @@
         <a:sysClr val="window" lastClr="FFFFFF"/>
       </a:lt1>
       <a:dk2>
-        <a:srgbClr val="0E2841"/>
+        <a:srgbClr val="1F497D"/>
       </a:dk2>
       <a:lt2>
-        <a:srgbClr val="E8E8E8"/>
+        <a:srgbClr val="EEECE1"/>
       </a:lt2>
       <a:accent1>
-        <a:srgbClr val="156082"/>
+        <a:srgbClr val="4F81BD"/>
       </a:accent1>
       <a:accent2>
-        <a:srgbClr val="E97132"/>
+        <a:srgbClr val="C0504D"/>
       </a:accent2>
       <a:accent3>
-        <a:srgbClr val="196B24"/>
+        <a:srgbClr val="9BBB59"/>
       </a:accent3>
       <a:accent4>
-        <a:srgbClr val="0F9ED5"/>
+        <a:srgbClr val="8064A2"/>
       </a:accent4>
       <a:accent5>
-        <a:srgbClr val="A02B93"/>
+        <a:srgbClr val="4BACC6"/>
       </a:accent5>
       <a:accent6>
-        <a:srgbClr val="4EA72E"/>
+        <a:srgbClr val="F79646"/>
       </a:accent6>
       <a:hlink>
-        <a:srgbClr val="467886"/>
+        <a:srgbClr val="0000FF"/>
       </a:hlink>
       <a:folHlink>
-        <a:srgbClr val="96607D"/>
+        <a:srgbClr val="800080"/>
       </a:folHlink>
     </a:clrScheme>
     <a:fontScheme name="Office">
       <a:majorFont>
-        <a:latin typeface="Aptos Display" panose="02110004020202020204"/>
+        <a:latin typeface="Calibri"/>
         <a:ea typeface=""/>
         <a:cs typeface=""/>
-        <a:font script="Jpan" typeface="游ゴシック Light"/>
+        <a:font script="Jpan" typeface="ＭＳ Ｐゴシック"/>
         <a:font script="Hang" typeface="맑은 고딕"/>
-        <a:font script="Hans" typeface="等线 Light"/>
+        <a:font script="Hans" typeface="宋体"/>
         <a:font script="Hant" typeface="新細明體"/>
         <a:font script="Arab" typeface="Times New Roman"/>
         <a:font script="Hebr" typeface="Times New Roman"/>
@@ -30213,31 +30224,14 @@
         <a:font script="Viet" typeface="Times New Roman"/>
         <a:font script="Uigh" typeface="Microsoft Uighur"/>
         <a:font script="Geor" typeface="Sylfaen"/>
-        <a:font script="Armn" typeface="Arial"/>
-        <a:font script="Bugi" typeface="Leelawadee UI"/>
-        <a:font script="Bopo" typeface="Microsoft JhengHei"/>
-        <a:font script="Java" typeface="Javanese Text"/>
-        <a:font script="Lisu" typeface="Segoe UI"/>
-        <a:font script="Mymr" typeface="Myanmar Text"/>
-        <a:font script="Nkoo" typeface="Ebrima"/>
-        <a:font script="Olck" typeface="Nirmala UI"/>
-        <a:font script="Osma" typeface="Ebrima"/>
-        <a:font script="Phag" typeface="Phagspa"/>
-        <a:font script="Syrn" typeface="Estrangelo Edessa"/>
-        <a:font script="Syrj" typeface="Estrangelo Edessa"/>
-        <a:font script="Syre" typeface="Estrangelo Edessa"/>
-        <a:font script="Sora" typeface="Nirmala UI"/>
-        <a:font script="Tale" typeface="Microsoft Tai Le"/>
-        <a:font script="Talu" typeface="Microsoft New Tai Lue"/>
-        <a:font script="Tfng" typeface="Ebrima"/>
       </a:majorFont>
       <a:minorFont>
-        <a:latin typeface="Aptos" panose="02110004020202020204"/>
+        <a:latin typeface="Calibri"/>
         <a:ea typeface=""/>
         <a:cs typeface=""/>
-        <a:font script="Jpan" typeface="游ゴシック"/>
+        <a:font script="Jpan" typeface="ＭＳ Ｐゴシック"/>
         <a:font script="Hang" typeface="맑은 고딕"/>
-        <a:font script="Hans" typeface="等线"/>
+        <a:font script="Hans" typeface="宋体"/>
         <a:font script="Hant" typeface="新細明體"/>
         <a:font script="Arab" typeface="Arial"/>
         <a:font script="Hebr" typeface="Arial"/>
@@ -30265,23 +30259,6 @@
         <a:font script="Viet" typeface="Arial"/>
         <a:font script="Uigh" typeface="Microsoft Uighur"/>
         <a:font script="Geor" typeface="Sylfaen"/>
-        <a:font script="Armn" typeface="Arial"/>
-        <a:font script="Bugi" typeface="Leelawadee UI"/>
-        <a:font script="Bopo" typeface="Microsoft JhengHei"/>
-        <a:font script="Java" typeface="Javanese Text"/>
-        <a:font script="Lisu" typeface="Segoe UI"/>
-        <a:font script="Mymr" typeface="Myanmar Text"/>
-        <a:font script="Nkoo" typeface="Ebrima"/>
-        <a:font script="Olck" typeface="Nirmala UI"/>
-        <a:font script="Osma" typeface="Ebrima"/>
-        <a:font script="Phag" typeface="Phagspa"/>
-        <a:font script="Syrn" typeface="Estrangelo Edessa"/>
-        <a:font script="Syrj" typeface="Estrangelo Edessa"/>
-        <a:font script="Syre" typeface="Estrangelo Edessa"/>
-        <a:font script="Sora" typeface="Nirmala UI"/>
-        <a:font script="Tale" typeface="Microsoft Tai Le"/>
-        <a:font script="Talu" typeface="Microsoft New Tai Lue"/>
-        <a:font script="Tfng" typeface="Ebrima"/>
       </a:minorFont>
     </a:fontScheme>
     <a:fmtScheme name="Office">
@@ -30293,136 +30270,180 @@
           <a:gsLst>
             <a:gs pos="0">
               <a:schemeClr val="phClr">
-                <a:lumMod val="110000"/>
-                <a:satMod val="105000"/>
-                <a:tint val="67000"/>
+                <a:tint val="50000"/>
+                <a:satMod val="300000"/>
               </a:schemeClr>
             </a:gs>
-            <a:gs pos="50000">
+            <a:gs pos="35000">
               <a:schemeClr val="phClr">
-                <a:lumMod val="105000"/>
-                <a:satMod val="103000"/>
-                <a:tint val="73000"/>
+                <a:tint val="37000"/>
+                <a:satMod val="300000"/>
               </a:schemeClr>
             </a:gs>
             <a:gs pos="100000">
               <a:schemeClr val="phClr">
-                <a:lumMod val="105000"/>
-                <a:satMod val="109000"/>
-                <a:tint val="81000"/>
+                <a:tint val="15000"/>
+                <a:satMod val="350000"/>
               </a:schemeClr>
             </a:gs>
           </a:gsLst>
-          <a:lin ang="5400000" scaled="0"/>
+          <a:lin ang="16200000" scaled="1"/>
         </a:gradFill>
         <a:gradFill rotWithShape="1">
           <a:gsLst>
             <a:gs pos="0">
               <a:schemeClr val="phClr">
-                <a:satMod val="103000"/>
-                <a:lumMod val="102000"/>
-                <a:tint val="94000"/>
-              </a:schemeClr>
-            </a:gs>
-            <a:gs pos="50000">
-              <a:schemeClr val="phClr">
-                <a:satMod val="110000"/>
-                <a:lumMod val="100000"/>
+                <a:tint val="100000"/>
                 <a:shade val="100000"/>
+                <a:satMod val="130000"/>
               </a:schemeClr>
             </a:gs>
             <a:gs pos="100000">
               <a:schemeClr val="phClr">
-                <a:lumMod val="99000"/>
-                <a:satMod val="120000"/>
-                <a:shade val="78000"/>
+                <a:tint val="50000"/>
+                <a:shade val="100000"/>
+                <a:satMod val="350000"/>
               </a:schemeClr>
             </a:gs>
           </a:gsLst>
-          <a:lin ang="5400000" scaled="0"/>
+          <a:lin ang="16200000" scaled="0"/>
         </a:gradFill>
       </a:fillStyleLst>
       <a:lnStyleLst>
-        <a:ln w="12700" cap="flat" cmpd="sng" algn="ctr">
+        <a:ln w="9525" cap="flat" cmpd="sng" algn="ctr">
           <a:solidFill>
-            <a:schemeClr val="phClr"/>
+            <a:schemeClr val="phClr">
+              <a:shade val="95000"/>
+              <a:satMod val="105000"/>
+            </a:schemeClr>
           </a:solidFill>
           <a:prstDash val="solid"/>
-          <a:miter lim="800000"/>
-        </a:ln>
-        <a:ln w="19050" cap="flat" cmpd="sng" algn="ctr">
-          <a:solidFill>
-            <a:schemeClr val="phClr"/>
-          </a:solidFill>
-          <a:prstDash val="solid"/>
-          <a:miter lim="800000"/>
         </a:ln>
         <a:ln w="25400" cap="flat" cmpd="sng" algn="ctr">
           <a:solidFill>
             <a:schemeClr val="phClr"/>
           </a:solidFill>
           <a:prstDash val="solid"/>
-          <a:miter lim="800000"/>
+        </a:ln>
+        <a:ln w="38100" cap="flat" cmpd="sng" algn="ctr">
+          <a:solidFill>
+            <a:schemeClr val="phClr"/>
+          </a:solidFill>
+          <a:prstDash val="solid"/>
         </a:ln>
       </a:lnStyleLst>
       <a:effectStyleLst>
         <a:effectStyle>
-          <a:effectLst/>
-        </a:effectStyle>
-        <a:effectStyle>
-          <a:effectLst/>
+          <a:effectLst>
+            <a:outerShdw blurRad="40000" dist="20000" dir="5400000" rotWithShape="0">
+              <a:srgbClr val="000000">
+                <a:alpha val="38000"/>
+              </a:srgbClr>
+            </a:outerShdw>
+          </a:effectLst>
         </a:effectStyle>
         <a:effectStyle>
           <a:effectLst>
-            <a:outerShdw blurRad="57150" dist="19050" dir="5400000" algn="ctr" rotWithShape="0">
+            <a:outerShdw blurRad="40000" dist="23000" dir="5400000" rotWithShape="0">
               <a:srgbClr val="000000">
-                <a:alpha val="63000"/>
+                <a:alpha val="35000"/>
               </a:srgbClr>
             </a:outerShdw>
           </a:effectLst>
+        </a:effectStyle>
+        <a:effectStyle>
+          <a:effectLst>
+            <a:outerShdw blurRad="40000" dist="23000" dir="5400000" rotWithShape="0">
+              <a:srgbClr val="000000">
+                <a:alpha val="35000"/>
+              </a:srgbClr>
+            </a:outerShdw>
+          </a:effectLst>
+          <a:scene3d>
+            <a:camera prst="orthographicFront">
+              <a:rot lat="0" lon="0" rev="0"/>
+            </a:camera>
+            <a:lightRig rig="threePt" dir="t">
+              <a:rot lat="0" lon="0" rev="1200000"/>
+            </a:lightRig>
+          </a:scene3d>
+          <a:sp3d>
+            <a:bevelT w="63500" h="25400"/>
+          </a:sp3d>
         </a:effectStyle>
       </a:effectStyleLst>
       <a:bgFillStyleLst>
         <a:solidFill>
           <a:schemeClr val="phClr"/>
         </a:solidFill>
-        <a:solidFill>
-          <a:schemeClr val="phClr">
-            <a:tint val="95000"/>
-            <a:satMod val="170000"/>
-          </a:schemeClr>
-        </a:solidFill>
         <a:gradFill rotWithShape="1">
           <a:gsLst>
             <a:gs pos="0">
               <a:schemeClr val="phClr">
-                <a:tint val="93000"/>
-                <a:satMod val="150000"/>
-                <a:shade val="98000"/>
-                <a:lumMod val="102000"/>
+                <a:tint val="40000"/>
+                <a:satMod val="350000"/>
               </a:schemeClr>
             </a:gs>
-            <a:gs pos="50000">
+            <a:gs pos="40000">
               <a:schemeClr val="phClr">
-                <a:tint val="98000"/>
-                <a:satMod val="130000"/>
-                <a:shade val="90000"/>
-                <a:lumMod val="103000"/>
+                <a:tint val="45000"/>
+                <a:shade val="99000"/>
+                <a:satMod val="350000"/>
               </a:schemeClr>
             </a:gs>
             <a:gs pos="100000">
               <a:schemeClr val="phClr">
-                <a:shade val="63000"/>
-                <a:satMod val="120000"/>
+                <a:shade val="20000"/>
+                <a:satMod val="255000"/>
               </a:schemeClr>
             </a:gs>
           </a:gsLst>
-          <a:lin ang="5400000" scaled="0"/>
+          <a:path path="circle">
+            <a:fillToRect l="50000" t="-80000" r="50000" b="180000"/>
+          </a:path>
+        </a:gradFill>
+        <a:gradFill rotWithShape="1">
+          <a:gsLst>
+            <a:gs pos="0">
+              <a:schemeClr val="phClr">
+                <a:tint val="80000"/>
+                <a:satMod val="300000"/>
+              </a:schemeClr>
+            </a:gs>
+            <a:gs pos="100000">
+              <a:schemeClr val="phClr">
+                <a:shade val="30000"/>
+                <a:satMod val="200000"/>
+              </a:schemeClr>
+            </a:gs>
+          </a:gsLst>
+          <a:path path="circle">
+            <a:fillToRect l="50000" t="50000" r="50000" b="50000"/>
+          </a:path>
         </a:gradFill>
       </a:bgFillStyleLst>
     </a:fmtScheme>
   </a:themeElements>
   <a:objectDefaults>
+    <a:spDef>
+      <a:spPr/>
+      <a:bodyPr/>
+      <a:lstStyle/>
+      <a:style>
+        <a:lnRef idx="1">
+          <a:schemeClr val="accent1"/>
+        </a:lnRef>
+        <a:fillRef idx="3">
+          <a:schemeClr val="accent1"/>
+        </a:fillRef>
+        <a:effectRef idx="2">
+          <a:schemeClr val="accent1"/>
+        </a:effectRef>
+        <a:fontRef idx="minor">
+          <a:schemeClr val="lt1"/>
+        </a:fontRef>
+      </a:style>
+    </a:spDef>
     <a:lnDef>
       <a:spPr/>
       <a:bodyPr/>
@@ -30444,11 +30465,6 @@
     </a:lnDef>
   </a:objectDefaults>
   <a:extraClrSchemeLst/>
-  <a:extLst>
-    <a:ext uri="{05A4C25C-085E-4340-85A3-A5531E510DB2}">
-      <thm15:themeFamily xmlns:thm15="http://schemas.microsoft.com/office/thememl/2012/main" name="Office Theme" id="{2E142A2C-CD16-42D6-873A-C26D2A0506FA}" vid="{1BDDFF52-6CD6-40A5-AB3C-68EB2F1E4D0A}"/>
-    </a:ext>
-  </a:extLst>
 </a:theme>
 </file>
 

--- a/docs/사업계획서/2026-10_스마트경찰경광등_사업계획_과제제안.pptx
+++ b/docs/사업계획서/2026-10_스마트경찰경광등_사업계획_과제제안.pptx
@@ -8342,7 +8342,7 @@
                 <a:ea typeface="Noto Sans KR"/>
                 <a:cs typeface="Noto Sans KR"/>
               </a:rPr>
-              <a:t>구매연계형, 폴리스랩 3.0, 조달청 시범구매연계형이 우선순위다</a:t>
+              <a:t>구매연계형과 폴리스랩 3.0이 우선이고, 조달청 과제는 수요 목록 확인 후 정한다</a:t>
             </a:r>
           </a:p>
         </p:txBody>
@@ -8357,7 +8357,7 @@
         </p:nvGraphicFramePr>
         <p:xfrm>
           <a:off x="365760" y="1200000"/>
-          <a:ext cx="11460480" cy="4480000"/>
+          <a:ext cx="11460480" cy="4508358"/>
         </p:xfrm>
         <a:graphic>
           <a:graphicData uri="http://schemas.openxmlformats.org/drawingml/2006/table">
@@ -8785,7 +8785,7 @@
                           <a:ea typeface="Noto Sans KR"/>
                           <a:cs typeface="Noto Sans KR"/>
                         </a:rPr>
-                        <a:t>상반기 1~2월, 하반기 5/25~6/29</a:t>
+                        <a:t>3차 공고 5/25, 접수 6/15~6/29</a:t>
                       </a:r>
                     </a:p>
                   </a:txBody>
@@ -8829,7 +8829,7 @@
                           <a:ea typeface="Noto Sans KR"/>
                           <a:cs typeface="Noto Sans KR"/>
                         </a:rPr>
-                        <a:t>수요처 구매동의서 또는 구매계약서</a:t>
+                        <a:t>수요처 구매동의서 또는 구매계약서, 상반기 접수 시기 미확인</a:t>
                       </a:r>
                     </a:p>
                   </a:txBody>
@@ -8875,6 +8875,273 @@
                           <a:cs typeface="Noto Sans KR"/>
                         </a:rPr>
                         <a:t>★★★★★</a:t>
+                      </a:r>
+                    </a:p>
+                  </a:txBody>
+                  <a:tcPr marL="70000" marR="70000" marT="40000" marB="40000" anchor="ctr">
+                    <a:lnL w="6350" cap="flat" cmpd="sng">
+                      <a:solidFill>
+                        <a:srgbClr val="BFBFBF"/>
+                      </a:solidFill>
+                    </a:lnL>
+                    <a:lnR w="6350" cap="flat" cmpd="sng">
+                      <a:solidFill>
+                        <a:srgbClr val="BFBFBF"/>
+                      </a:solidFill>
+                    </a:lnR>
+                    <a:lnT w="6350" cap="flat" cmpd="sng">
+                      <a:solidFill>
+                        <a:srgbClr val="BFBFBF"/>
+                      </a:solidFill>
+                    </a:lnT>
+                    <a:lnB w="6350" cap="flat" cmpd="sng">
+                      <a:solidFill>
+                        <a:srgbClr val="BFBFBF"/>
+                      </a:solidFill>
+                    </a:lnB>
+                    <a:solidFill>
+                      <a:srgbClr val="FFFFFF"/>
+                    </a:solidFill>
+                  </a:tcPr>
+                </a:tc>
+              </a:tr>
+              <a:tr h="668358">
+                <a:tc>
+                  <a:txBody>
+                    <a:bodyPr wrap="square"/>
+                    <a:lstStyle/>
+                    <a:p>
+                      <a:r>
+                        <a:rPr sz="1150" b="1" i="0" lang="ko-KR">
+                          <a:solidFill>
+                            <a:srgbClr val="222222"/>
+                          </a:solidFill>
+                          <a:latin typeface="Noto Sans KR"/>
+                          <a:ea typeface="Noto Sans KR"/>
+                          <a:cs typeface="Noto Sans KR"/>
+                        </a:rPr>
+                        <a:t>공공혁신수요기반 혁신제품 기술개발 시범구매연계형</a:t>
+                      </a:r>
+                    </a:p>
+                  </a:txBody>
+                  <a:tcPr marL="70000" marR="70000" marT="40000" marB="40000" anchor="ctr">
+                    <a:lnL w="6350" cap="flat" cmpd="sng">
+                      <a:solidFill>
+                        <a:srgbClr val="BFBFBF"/>
+                      </a:solidFill>
+                    </a:lnL>
+                    <a:lnR w="6350" cap="flat" cmpd="sng">
+                      <a:solidFill>
+                        <a:srgbClr val="BFBFBF"/>
+                      </a:solidFill>
+                    </a:lnR>
+                    <a:lnT w="6350" cap="flat" cmpd="sng">
+                      <a:solidFill>
+                        <a:srgbClr val="BFBFBF"/>
+                      </a:solidFill>
+                    </a:lnT>
+                    <a:lnB w="6350" cap="flat" cmpd="sng">
+                      <a:solidFill>
+                        <a:srgbClr val="BFBFBF"/>
+                      </a:solidFill>
+                    </a:lnB>
+                    <a:solidFill>
+                      <a:srgbClr val="FFFFFF"/>
+                    </a:solidFill>
+                  </a:tcPr>
+                </a:tc>
+                <a:tc>
+                  <a:txBody>
+                    <a:bodyPr wrap="square"/>
+                    <a:lstStyle/>
+                    <a:p>
+                      <a:r>
+                        <a:rPr sz="1150" b="0" i="0" lang="ko-KR">
+                          <a:solidFill>
+                            <a:srgbClr val="222222"/>
+                          </a:solidFill>
+                          <a:latin typeface="Noto Sans KR"/>
+                          <a:ea typeface="Noto Sans KR"/>
+                          <a:cs typeface="Noto Sans KR"/>
+                        </a:rPr>
+                        <a:t>조달청</a:t>
+                      </a:r>
+                    </a:p>
+                  </a:txBody>
+                  <a:tcPr marL="70000" marR="70000" marT="40000" marB="40000" anchor="ctr">
+                    <a:lnL w="6350" cap="flat" cmpd="sng">
+                      <a:solidFill>
+                        <a:srgbClr val="BFBFBF"/>
+                      </a:solidFill>
+                    </a:lnL>
+                    <a:lnR w="6350" cap="flat" cmpd="sng">
+                      <a:solidFill>
+                        <a:srgbClr val="BFBFBF"/>
+                      </a:solidFill>
+                    </a:lnR>
+                    <a:lnT w="6350" cap="flat" cmpd="sng">
+                      <a:solidFill>
+                        <a:srgbClr val="BFBFBF"/>
+                      </a:solidFill>
+                    </a:lnT>
+                    <a:lnB w="6350" cap="flat" cmpd="sng">
+                      <a:solidFill>
+                        <a:srgbClr val="BFBFBF"/>
+                      </a:solidFill>
+                    </a:lnB>
+                    <a:solidFill>
+                      <a:srgbClr val="FFFFFF"/>
+                    </a:solidFill>
+                  </a:tcPr>
+                </a:tc>
+                <a:tc>
+                  <a:txBody>
+                    <a:bodyPr wrap="square"/>
+                    <a:lstStyle/>
+                    <a:p>
+                      <a:r>
+                        <a:rPr sz="1150" b="0" i="0" lang="ko-KR">
+                          <a:solidFill>
+                            <a:srgbClr val="222222"/>
+                          </a:solidFill>
+                          <a:latin typeface="Noto Sans KR"/>
+                          <a:ea typeface="Noto Sans KR"/>
+                          <a:cs typeface="Noto Sans KR"/>
+                        </a:rPr>
+                        <a:t>2년 내외 10억 내외</a:t>
+                      </a:r>
+                    </a:p>
+                  </a:txBody>
+                  <a:tcPr marL="70000" marR="70000" marT="40000" marB="40000" anchor="ctr">
+                    <a:lnL w="6350" cap="flat" cmpd="sng">
+                      <a:solidFill>
+                        <a:srgbClr val="BFBFBF"/>
+                      </a:solidFill>
+                    </a:lnL>
+                    <a:lnR w="6350" cap="flat" cmpd="sng">
+                      <a:solidFill>
+                        <a:srgbClr val="BFBFBF"/>
+                      </a:solidFill>
+                    </a:lnR>
+                    <a:lnT w="6350" cap="flat" cmpd="sng">
+                      <a:solidFill>
+                        <a:srgbClr val="BFBFBF"/>
+                      </a:solidFill>
+                    </a:lnT>
+                    <a:lnB w="6350" cap="flat" cmpd="sng">
+                      <a:solidFill>
+                        <a:srgbClr val="BFBFBF"/>
+                      </a:solidFill>
+                    </a:lnB>
+                    <a:solidFill>
+                      <a:srgbClr val="FFFFFF"/>
+                    </a:solidFill>
+                  </a:tcPr>
+                </a:tc>
+                <a:tc>
+                  <a:txBody>
+                    <a:bodyPr wrap="square"/>
+                    <a:lstStyle/>
+                    <a:p>
+                      <a:r>
+                        <a:rPr sz="1150" b="0" i="0" lang="ko-KR">
+                          <a:solidFill>
+                            <a:srgbClr val="222222"/>
+                          </a:solidFill>
+                          <a:latin typeface="Noto Sans KR"/>
+                          <a:ea typeface="Noto Sans KR"/>
+                          <a:cs typeface="Noto Sans KR"/>
+                        </a:rPr>
+                        <a:t>공고 5/13, 접수 5/18~6/10</a:t>
+                      </a:r>
+                    </a:p>
+                  </a:txBody>
+                  <a:tcPr marL="70000" marR="70000" marT="40000" marB="40000" anchor="ctr">
+                    <a:lnL w="6350" cap="flat" cmpd="sng">
+                      <a:solidFill>
+                        <a:srgbClr val="BFBFBF"/>
+                      </a:solidFill>
+                    </a:lnL>
+                    <a:lnR w="6350" cap="flat" cmpd="sng">
+                      <a:solidFill>
+                        <a:srgbClr val="BFBFBF"/>
+                      </a:solidFill>
+                    </a:lnR>
+                    <a:lnT w="6350" cap="flat" cmpd="sng">
+                      <a:solidFill>
+                        <a:srgbClr val="BFBFBF"/>
+                      </a:solidFill>
+                    </a:lnT>
+                    <a:lnB w="6350" cap="flat" cmpd="sng">
+                      <a:solidFill>
+                        <a:srgbClr val="BFBFBF"/>
+                      </a:solidFill>
+                    </a:lnB>
+                    <a:solidFill>
+                      <a:srgbClr val="FFFFFF"/>
+                    </a:solidFill>
+                  </a:tcPr>
+                </a:tc>
+                <a:tc>
+                  <a:txBody>
+                    <a:bodyPr wrap="square"/>
+                    <a:lstStyle/>
+                    <a:p>
+                      <a:r>
+                        <a:rPr sz="1150" b="0" i="0" lang="ko-KR">
+                          <a:solidFill>
+                            <a:srgbClr val="222222"/>
+                          </a:solidFill>
+                          <a:latin typeface="Noto Sans KR"/>
+                          <a:ea typeface="Noto Sans KR"/>
+                          <a:cs typeface="Noto Sans KR"/>
+                        </a:rPr>
+                        <a:t>기업부설연구소 필수, 지정 수요 12개 중 1개 선택, 경광등 수요 미확인</a:t>
+                      </a:r>
+                    </a:p>
+                  </a:txBody>
+                  <a:tcPr marL="70000" marR="70000" marT="40000" marB="40000" anchor="ctr">
+                    <a:lnL w="6350" cap="flat" cmpd="sng">
+                      <a:solidFill>
+                        <a:srgbClr val="BFBFBF"/>
+                      </a:solidFill>
+                    </a:lnL>
+                    <a:lnR w="6350" cap="flat" cmpd="sng">
+                      <a:solidFill>
+                        <a:srgbClr val="BFBFBF"/>
+                      </a:solidFill>
+                    </a:lnR>
+                    <a:lnT w="6350" cap="flat" cmpd="sng">
+                      <a:solidFill>
+                        <a:srgbClr val="BFBFBF"/>
+                      </a:solidFill>
+                    </a:lnT>
+                    <a:lnB w="6350" cap="flat" cmpd="sng">
+                      <a:solidFill>
+                        <a:srgbClr val="BFBFBF"/>
+                      </a:solidFill>
+                    </a:lnB>
+                    <a:solidFill>
+                      <a:srgbClr val="FFFFFF"/>
+                    </a:solidFill>
+                  </a:tcPr>
+                </a:tc>
+                <a:tc>
+                  <a:txBody>
+                    <a:bodyPr wrap="square"/>
+                    <a:lstStyle/>
+                    <a:p>
+                      <a:pPr algn="ctr"/>
+                      <a:r>
+                        <a:rPr sz="1150" b="0" i="0" lang="ko-KR">
+                          <a:solidFill>
+                            <a:srgbClr val="222222"/>
+                          </a:solidFill>
+                          <a:latin typeface="Noto Sans KR"/>
+                          <a:ea typeface="Noto Sans KR"/>
+                          <a:cs typeface="Noto Sans KR"/>
+                        </a:rPr>
+                        <a:t>★★★</a:t>
                       </a:r>
                     </a:p>
                   </a:txBody>
@@ -8920,7 +9187,7 @@
                           <a:ea typeface="Noto Sans KR"/>
                           <a:cs typeface="Noto Sans KR"/>
                         </a:rPr>
-                        <a:t>공공혁신수요기반 혁신제품 기술개발 시범구매연계형</a:t>
+                        <a:t>치안현장 맞춤형 R&amp;D 폴리스랩 3.0 신속시범형</a:t>
                       </a:r>
                     </a:p>
                   </a:txBody>
@@ -8964,7 +9231,7 @@
                           <a:ea typeface="Noto Sans KR"/>
                           <a:cs typeface="Noto Sans KR"/>
                         </a:rPr>
-                        <a:t>조달청</a:t>
+                        <a:t>과기정통부·경찰청</a:t>
                       </a:r>
                     </a:p>
                   </a:txBody>
@@ -9008,7 +9275,7 @@
                           <a:ea typeface="Noto Sans KR"/>
                           <a:cs typeface="Noto Sans KR"/>
                         </a:rPr>
-                        <a:t>2년 내외 10억 내외</a:t>
+                        <a:t>18개월 9억(선정 사례, 한도 미확인)</a:t>
                       </a:r>
                     </a:p>
                   </a:txBody>
@@ -9052,274 +9319,7 @@
                           <a:ea typeface="Noto Sans KR"/>
                           <a:cs typeface="Noto Sans KR"/>
                         </a:rPr>
-                        <a:t>5/18~6/10</a:t>
-                      </a:r>
-                    </a:p>
-                  </a:txBody>
-                  <a:tcPr marL="70000" marR="70000" marT="40000" marB="40000" anchor="ctr">
-                    <a:lnL w="6350" cap="flat" cmpd="sng">
-                      <a:solidFill>
-                        <a:srgbClr val="BFBFBF"/>
-                      </a:solidFill>
-                    </a:lnL>
-                    <a:lnR w="6350" cap="flat" cmpd="sng">
-                      <a:solidFill>
-                        <a:srgbClr val="BFBFBF"/>
-                      </a:solidFill>
-                    </a:lnR>
-                    <a:lnT w="6350" cap="flat" cmpd="sng">
-                      <a:solidFill>
-                        <a:srgbClr val="BFBFBF"/>
-                      </a:solidFill>
-                    </a:lnT>
-                    <a:lnB w="6350" cap="flat" cmpd="sng">
-                      <a:solidFill>
-                        <a:srgbClr val="BFBFBF"/>
-                      </a:solidFill>
-                    </a:lnB>
-                    <a:solidFill>
-                      <a:srgbClr val="FFFFFF"/>
-                    </a:solidFill>
-                  </a:tcPr>
-                </a:tc>
-                <a:tc>
-                  <a:txBody>
-                    <a:bodyPr wrap="square"/>
-                    <a:lstStyle/>
-                    <a:p>
-                      <a:r>
-                        <a:rPr sz="1150" b="0" i="0" lang="ko-KR">
-                          <a:solidFill>
-                            <a:srgbClr val="222222"/>
-                          </a:solidFill>
-                          <a:latin typeface="Noto Sans KR"/>
-                          <a:ea typeface="Noto Sans KR"/>
-                          <a:cs typeface="Noto Sans KR"/>
-                        </a:rPr>
-                        <a:t>중소기업, 공공수요 연계, 완료 후 혁신제품·시범구매 연계</a:t>
-                      </a:r>
-                    </a:p>
-                  </a:txBody>
-                  <a:tcPr marL="70000" marR="70000" marT="40000" marB="40000" anchor="ctr">
-                    <a:lnL w="6350" cap="flat" cmpd="sng">
-                      <a:solidFill>
-                        <a:srgbClr val="BFBFBF"/>
-                      </a:solidFill>
-                    </a:lnL>
-                    <a:lnR w="6350" cap="flat" cmpd="sng">
-                      <a:solidFill>
-                        <a:srgbClr val="BFBFBF"/>
-                      </a:solidFill>
-                    </a:lnR>
-                    <a:lnT w="6350" cap="flat" cmpd="sng">
-                      <a:solidFill>
-                        <a:srgbClr val="BFBFBF"/>
-                      </a:solidFill>
-                    </a:lnT>
-                    <a:lnB w="6350" cap="flat" cmpd="sng">
-                      <a:solidFill>
-                        <a:srgbClr val="BFBFBF"/>
-                      </a:solidFill>
-                    </a:lnB>
-                    <a:solidFill>
-                      <a:srgbClr val="FFFFFF"/>
-                    </a:solidFill>
-                  </a:tcPr>
-                </a:tc>
-                <a:tc>
-                  <a:txBody>
-                    <a:bodyPr wrap="square"/>
-                    <a:lstStyle/>
-                    <a:p>
-                      <a:pPr algn="ctr"/>
-                      <a:r>
-                        <a:rPr sz="1150" b="0" i="0" lang="ko-KR">
-                          <a:solidFill>
-                            <a:srgbClr val="222222"/>
-                          </a:solidFill>
-                          <a:latin typeface="Noto Sans KR"/>
-                          <a:ea typeface="Noto Sans KR"/>
-                          <a:cs typeface="Noto Sans KR"/>
-                        </a:rPr>
-                        <a:t>★★★★★</a:t>
-                      </a:r>
-                    </a:p>
-                  </a:txBody>
-                  <a:tcPr marL="70000" marR="70000" marT="40000" marB="40000" anchor="ctr">
-                    <a:lnL w="6350" cap="flat" cmpd="sng">
-                      <a:solidFill>
-                        <a:srgbClr val="BFBFBF"/>
-                      </a:solidFill>
-                    </a:lnL>
-                    <a:lnR w="6350" cap="flat" cmpd="sng">
-                      <a:solidFill>
-                        <a:srgbClr val="BFBFBF"/>
-                      </a:solidFill>
-                    </a:lnR>
-                    <a:lnT w="6350" cap="flat" cmpd="sng">
-                      <a:solidFill>
-                        <a:srgbClr val="BFBFBF"/>
-                      </a:solidFill>
-                    </a:lnT>
-                    <a:lnB w="6350" cap="flat" cmpd="sng">
-                      <a:solidFill>
-                        <a:srgbClr val="BFBFBF"/>
-                      </a:solidFill>
-                    </a:lnB>
-                    <a:solidFill>
-                      <a:srgbClr val="FFFFFF"/>
-                    </a:solidFill>
-                  </a:tcPr>
-                </a:tc>
-              </a:tr>
-              <a:tr h="640000">
-                <a:tc>
-                  <a:txBody>
-                    <a:bodyPr wrap="square"/>
-                    <a:lstStyle/>
-                    <a:p>
-                      <a:r>
-                        <a:rPr sz="1150" b="1" i="0" lang="ko-KR">
-                          <a:solidFill>
-                            <a:srgbClr val="222222"/>
-                          </a:solidFill>
-                          <a:latin typeface="Noto Sans KR"/>
-                          <a:ea typeface="Noto Sans KR"/>
-                          <a:cs typeface="Noto Sans KR"/>
-                        </a:rPr>
-                        <a:t>치안현장 맞춤형 R&amp;D 폴리스랩 3.0 신속시범형</a:t>
-                      </a:r>
-                    </a:p>
-                  </a:txBody>
-                  <a:tcPr marL="70000" marR="70000" marT="40000" marB="40000" anchor="ctr">
-                    <a:lnL w="6350" cap="flat" cmpd="sng">
-                      <a:solidFill>
-                        <a:srgbClr val="BFBFBF"/>
-                      </a:solidFill>
-                    </a:lnL>
-                    <a:lnR w="6350" cap="flat" cmpd="sng">
-                      <a:solidFill>
-                        <a:srgbClr val="BFBFBF"/>
-                      </a:solidFill>
-                    </a:lnR>
-                    <a:lnT w="6350" cap="flat" cmpd="sng">
-                      <a:solidFill>
-                        <a:srgbClr val="BFBFBF"/>
-                      </a:solidFill>
-                    </a:lnT>
-                    <a:lnB w="6350" cap="flat" cmpd="sng">
-                      <a:solidFill>
-                        <a:srgbClr val="BFBFBF"/>
-                      </a:solidFill>
-                    </a:lnB>
-                    <a:solidFill>
-                      <a:srgbClr val="FFFFFF"/>
-                    </a:solidFill>
-                  </a:tcPr>
-                </a:tc>
-                <a:tc>
-                  <a:txBody>
-                    <a:bodyPr wrap="square"/>
-                    <a:lstStyle/>
-                    <a:p>
-                      <a:r>
-                        <a:rPr sz="1150" b="0" i="0" lang="ko-KR">
-                          <a:solidFill>
-                            <a:srgbClr val="222222"/>
-                          </a:solidFill>
-                          <a:latin typeface="Noto Sans KR"/>
-                          <a:ea typeface="Noto Sans KR"/>
-                          <a:cs typeface="Noto Sans KR"/>
-                        </a:rPr>
-                        <a:t>과기정통부·경찰청</a:t>
-                      </a:r>
-                    </a:p>
-                  </a:txBody>
-                  <a:tcPr marL="70000" marR="70000" marT="40000" marB="40000" anchor="ctr">
-                    <a:lnL w="6350" cap="flat" cmpd="sng">
-                      <a:solidFill>
-                        <a:srgbClr val="BFBFBF"/>
-                      </a:solidFill>
-                    </a:lnL>
-                    <a:lnR w="6350" cap="flat" cmpd="sng">
-                      <a:solidFill>
-                        <a:srgbClr val="BFBFBF"/>
-                      </a:solidFill>
-                    </a:lnR>
-                    <a:lnT w="6350" cap="flat" cmpd="sng">
-                      <a:solidFill>
-                        <a:srgbClr val="BFBFBF"/>
-                      </a:solidFill>
-                    </a:lnT>
-                    <a:lnB w="6350" cap="flat" cmpd="sng">
-                      <a:solidFill>
-                        <a:srgbClr val="BFBFBF"/>
-                      </a:solidFill>
-                    </a:lnB>
-                    <a:solidFill>
-                      <a:srgbClr val="FFFFFF"/>
-                    </a:solidFill>
-                  </a:tcPr>
-                </a:tc>
-                <a:tc>
-                  <a:txBody>
-                    <a:bodyPr wrap="square"/>
-                    <a:lstStyle/>
-                    <a:p>
-                      <a:r>
-                        <a:rPr sz="1150" b="0" i="0" lang="ko-KR">
-                          <a:solidFill>
-                            <a:srgbClr val="222222"/>
-                          </a:solidFill>
-                          <a:latin typeface="Noto Sans KR"/>
-                          <a:ea typeface="Noto Sans KR"/>
-                          <a:cs typeface="Noto Sans KR"/>
-                        </a:rPr>
-                        <a:t>18개월 9억(2026 사례)</a:t>
-                      </a:r>
-                    </a:p>
-                  </a:txBody>
-                  <a:tcPr marL="70000" marR="70000" marT="40000" marB="40000" anchor="ctr">
-                    <a:lnL w="6350" cap="flat" cmpd="sng">
-                      <a:solidFill>
-                        <a:srgbClr val="BFBFBF"/>
-                      </a:solidFill>
-                    </a:lnL>
-                    <a:lnR w="6350" cap="flat" cmpd="sng">
-                      <a:solidFill>
-                        <a:srgbClr val="BFBFBF"/>
-                      </a:solidFill>
-                    </a:lnR>
-                    <a:lnT w="6350" cap="flat" cmpd="sng">
-                      <a:solidFill>
-                        <a:srgbClr val="BFBFBF"/>
-                      </a:solidFill>
-                    </a:lnT>
-                    <a:lnB w="6350" cap="flat" cmpd="sng">
-                      <a:solidFill>
-                        <a:srgbClr val="BFBFBF"/>
-                      </a:solidFill>
-                    </a:lnB>
-                    <a:solidFill>
-                      <a:srgbClr val="FFFFFF"/>
-                    </a:solidFill>
-                  </a:tcPr>
-                </a:tc>
-                <a:tc>
-                  <a:txBody>
-                    <a:bodyPr wrap="square"/>
-                    <a:lstStyle/>
-                    <a:p>
-                      <a:r>
-                        <a:rPr sz="1150" b="0" i="0" lang="ko-KR">
-                          <a:solidFill>
-                            <a:srgbClr val="222222"/>
-                          </a:solidFill>
-                          <a:latin typeface="Noto Sans KR"/>
-                          <a:ea typeface="Noto Sans KR"/>
-                          <a:cs typeface="Noto Sans KR"/>
-                        </a:rPr>
-                        <a:t>2026.7 착수</a:t>
+                        <a:t>선정계획 공고 4/21, 7월 착수</a:t>
                       </a:r>
                     </a:p>
                   </a:txBody>
@@ -10537,7 +10537,7 @@
                 <a:ea typeface="Noto Sans KR"/>
                 <a:cs typeface="Noto Sans KR"/>
               </a:rPr>
-              <a:t>조달청 시범구매연계형(10억) 단독. 금액이 가장 크고 완료 즉시 혁신제품·시범구매로 연결되나 경쟁률이 높다.</a:t>
+              <a:t>조달청 시범구매연계형(10억) 단독. 지정 수요 12개 중 경광등 관련 수요가 있을 때만 가능하며 금액은 가장 크다.</a:t>
             </a:r>
           </a:p>
         </p:txBody>
@@ -11176,7 +11176,7 @@
                           <a:ea typeface="Noto Sans KR"/>
                           <a:cs typeface="Noto Sans KR"/>
                         </a:rPr>
-                        <a:t>조달청 시범구매연계형 접수, 구매연계형 하반기</a:t>
+                        <a:t>조달청 시범구매연계형 접수(수요 목록 확인 후), 구매연계형 하반기</a:t>
                       </a:r>
                     </a:p>
                   </a:txBody>
@@ -21728,7 +21728,7 @@
         </p:nvGraphicFramePr>
         <p:xfrm>
           <a:off x="365760" y="1200000"/>
-          <a:ext cx="11460480" cy="4760000"/>
+          <a:ext cx="11460480" cy="4800000"/>
         </p:xfrm>
         <a:graphic>
           <a:graphicData uri="http://schemas.openxmlformats.org/drawingml/2006/table">
@@ -21739,14 +21739,14 @@
                 <a:gridCol w="4800000"/>
                 <a:gridCol w="4160480"/>
               </a:tblGrid>
-              <a:tr h="680000">
-                <a:tc>
-                  <a:txBody>
-                    <a:bodyPr wrap="square"/>
-                    <a:lstStyle/>
-                    <a:p>
-                      <a:r>
-                        <a:rPr sz="1300" b="1" i="0" lang="ko-KR">
+              <a:tr h="600000">
+                <a:tc>
+                  <a:txBody>
+                    <a:bodyPr wrap="square"/>
+                    <a:lstStyle/>
+                    <a:p>
+                      <a:r>
+                        <a:rPr sz="1200" b="1" i="0" lang="ko-KR">
                           <a:solidFill>
                             <a:srgbClr val="FFFFFF"/>
                           </a:solidFill>
@@ -21790,7 +21790,7 @@
                     <a:lstStyle/>
                     <a:p>
                       <a:r>
-                        <a:rPr sz="1300" b="1" i="0" lang="ko-KR">
+                        <a:rPr sz="1200" b="1" i="0" lang="ko-KR">
                           <a:solidFill>
                             <a:srgbClr val="FFFFFF"/>
                           </a:solidFill>
@@ -21834,7 +21834,7 @@
                     <a:lstStyle/>
                     <a:p>
                       <a:r>
-                        <a:rPr sz="1300" b="1" i="0" lang="ko-KR">
+                        <a:rPr sz="1200" b="1" i="0" lang="ko-KR">
                           <a:solidFill>
                             <a:srgbClr val="FFFFFF"/>
                           </a:solidFill>
@@ -21873,14 +21873,14 @@
                   </a:tcPr>
                 </a:tc>
               </a:tr>
-              <a:tr h="680000">
-                <a:tc>
-                  <a:txBody>
-                    <a:bodyPr wrap="square"/>
-                    <a:lstStyle/>
-                    <a:p>
-                      <a:r>
-                        <a:rPr sz="1300" b="1" i="0" lang="ko-KR">
+              <a:tr h="600000">
+                <a:tc>
+                  <a:txBody>
+                    <a:bodyPr wrap="square"/>
+                    <a:lstStyle/>
+                    <a:p>
+                      <a:r>
+                        <a:rPr sz="1200" b="1" i="0" lang="ko-KR">
                           <a:solidFill>
                             <a:srgbClr val="222222"/>
                           </a:solidFill>
@@ -21924,7 +21924,7 @@
                     <a:lstStyle/>
                     <a:p>
                       <a:r>
-                        <a:rPr sz="1300" b="0" i="0" lang="ko-KR">
+                        <a:rPr sz="1200" b="0" i="0" lang="ko-KR">
                           <a:solidFill>
                             <a:srgbClr val="222222"/>
                           </a:solidFill>
@@ -21932,43 +21932,43 @@
                           <a:ea typeface="Noto Sans KR"/>
                           <a:cs typeface="Noto Sans KR"/>
                         </a:rPr>
-                        <a:t>공고 원문 미확인, 검색 요약 기준</a:t>
-                      </a:r>
-                    </a:p>
-                  </a:txBody>
-                  <a:tcPr marL="70000" marR="70000" marT="40000" marB="40000" anchor="ctr">
-                    <a:lnL w="6350" cap="flat" cmpd="sng">
-                      <a:solidFill>
-                        <a:srgbClr val="BFBFBF"/>
-                      </a:solidFill>
-                    </a:lnL>
-                    <a:lnR w="6350" cap="flat" cmpd="sng">
-                      <a:solidFill>
-                        <a:srgbClr val="BFBFBF"/>
-                      </a:solidFill>
-                    </a:lnR>
-                    <a:lnT w="6350" cap="flat" cmpd="sng">
-                      <a:solidFill>
-                        <a:srgbClr val="BFBFBF"/>
-                      </a:solidFill>
-                    </a:lnT>
-                    <a:lnB w="6350" cap="flat" cmpd="sng">
-                      <a:solidFill>
-                        <a:srgbClr val="BFBFBF"/>
-                      </a:solidFill>
-                    </a:lnB>
-                    <a:solidFill>
-                      <a:srgbClr val="FFFFFF"/>
-                    </a:solidFill>
-                  </a:tcPr>
-                </a:tc>
-                <a:tc>
-                  <a:txBody>
-                    <a:bodyPr wrap="square"/>
-                    <a:lstStyle/>
-                    <a:p>
-                      <a:r>
-                        <a:rPr sz="1300" b="0" i="0" lang="ko-KR">
+                        <a:t>공고 원문 미확인, 검색 요약 기준(구매연계형 3차 6/15~6/29, 조달청 5/18~6/10은 요약끼리 일치)</a:t>
+                      </a:r>
+                    </a:p>
+                  </a:txBody>
+                  <a:tcPr marL="70000" marR="70000" marT="40000" marB="40000" anchor="ctr">
+                    <a:lnL w="6350" cap="flat" cmpd="sng">
+                      <a:solidFill>
+                        <a:srgbClr val="BFBFBF"/>
+                      </a:solidFill>
+                    </a:lnL>
+                    <a:lnR w="6350" cap="flat" cmpd="sng">
+                      <a:solidFill>
+                        <a:srgbClr val="BFBFBF"/>
+                      </a:solidFill>
+                    </a:lnR>
+                    <a:lnT w="6350" cap="flat" cmpd="sng">
+                      <a:solidFill>
+                        <a:srgbClr val="BFBFBF"/>
+                      </a:solidFill>
+                    </a:lnT>
+                    <a:lnB w="6350" cap="flat" cmpd="sng">
+                      <a:solidFill>
+                        <a:srgbClr val="BFBFBF"/>
+                      </a:solidFill>
+                    </a:lnB>
+                    <a:solidFill>
+                      <a:srgbClr val="FFFFFF"/>
+                    </a:solidFill>
+                  </a:tcPr>
+                </a:tc>
+                <a:tc>
+                  <a:txBody>
+                    <a:bodyPr wrap="square"/>
+                    <a:lstStyle/>
+                    <a:p>
+                      <a:r>
+                        <a:rPr sz="1200" b="0" i="0" lang="ko-KR">
                           <a:solidFill>
                             <a:srgbClr val="222222"/>
                           </a:solidFill>
@@ -22007,14 +22007,14 @@
                   </a:tcPr>
                 </a:tc>
               </a:tr>
-              <a:tr h="680000">
-                <a:tc>
-                  <a:txBody>
-                    <a:bodyPr wrap="square"/>
-                    <a:lstStyle/>
-                    <a:p>
-                      <a:r>
-                        <a:rPr sz="1300" b="1" i="0" lang="ko-KR">
+              <a:tr h="600000">
+                <a:tc>
+                  <a:txBody>
+                    <a:bodyPr wrap="square"/>
+                    <a:lstStyle/>
+                    <a:p>
+                      <a:r>
+                        <a:rPr sz="1200" b="1" i="0" lang="ko-KR">
                           <a:solidFill>
                             <a:srgbClr val="222222"/>
                           </a:solidFill>
@@ -22022,6 +22022,140 @@
                           <a:ea typeface="Noto Sans KR"/>
                           <a:cs typeface="Noto Sans KR"/>
                         </a:rPr>
+                        <a:t>조달청 지정 수요</a:t>
+                      </a:r>
+                    </a:p>
+                  </a:txBody>
+                  <a:tcPr marL="70000" marR="70000" marT="40000" marB="40000" anchor="ctr">
+                    <a:lnL w="6350" cap="flat" cmpd="sng">
+                      <a:solidFill>
+                        <a:srgbClr val="BFBFBF"/>
+                      </a:solidFill>
+                    </a:lnL>
+                    <a:lnR w="6350" cap="flat" cmpd="sng">
+                      <a:solidFill>
+                        <a:srgbClr val="BFBFBF"/>
+                      </a:solidFill>
+                    </a:lnR>
+                    <a:lnT w="6350" cap="flat" cmpd="sng">
+                      <a:solidFill>
+                        <a:srgbClr val="BFBFBF"/>
+                      </a:solidFill>
+                    </a:lnT>
+                    <a:lnB w="6350" cap="flat" cmpd="sng">
+                      <a:solidFill>
+                        <a:srgbClr val="BFBFBF"/>
+                      </a:solidFill>
+                    </a:lnB>
+                    <a:solidFill>
+                      <a:srgbClr val="FFFFFF"/>
+                    </a:solidFill>
+                  </a:tcPr>
+                </a:tc>
+                <a:tc>
+                  <a:txBody>
+                    <a:bodyPr wrap="square"/>
+                    <a:lstStyle/>
+                    <a:p>
+                      <a:r>
+                        <a:rPr sz="1200" b="0" i="0" lang="ko-KR">
+                          <a:solidFill>
+                            <a:srgbClr val="222222"/>
+                          </a:solidFill>
+                          <a:latin typeface="Noto Sans KR"/>
+                          <a:ea typeface="Noto Sans KR"/>
+                          <a:cs typeface="Noto Sans KR"/>
+                        </a:rPr>
+                        <a:t>12개 지정 수요 중 1개 선택, 경광등 관련 수요 미확인</a:t>
+                      </a:r>
+                    </a:p>
+                  </a:txBody>
+                  <a:tcPr marL="70000" marR="70000" marT="40000" marB="40000" anchor="ctr">
+                    <a:lnL w="6350" cap="flat" cmpd="sng">
+                      <a:solidFill>
+                        <a:srgbClr val="BFBFBF"/>
+                      </a:solidFill>
+                    </a:lnL>
+                    <a:lnR w="6350" cap="flat" cmpd="sng">
+                      <a:solidFill>
+                        <a:srgbClr val="BFBFBF"/>
+                      </a:solidFill>
+                    </a:lnR>
+                    <a:lnT w="6350" cap="flat" cmpd="sng">
+                      <a:solidFill>
+                        <a:srgbClr val="BFBFBF"/>
+                      </a:solidFill>
+                    </a:lnT>
+                    <a:lnB w="6350" cap="flat" cmpd="sng">
+                      <a:solidFill>
+                        <a:srgbClr val="BFBFBF"/>
+                      </a:solidFill>
+                    </a:lnB>
+                    <a:solidFill>
+                      <a:srgbClr val="FFFFFF"/>
+                    </a:solidFill>
+                  </a:tcPr>
+                </a:tc>
+                <a:tc>
+                  <a:txBody>
+                    <a:bodyPr wrap="square"/>
+                    <a:lstStyle/>
+                    <a:p>
+                      <a:r>
+                        <a:rPr sz="1200" b="0" i="0" lang="ko-KR">
+                          <a:solidFill>
+                            <a:srgbClr val="222222"/>
+                          </a:solidFill>
+                          <a:latin typeface="Noto Sans KR"/>
+                          <a:ea typeface="Noto Sans KR"/>
+                          <a:cs typeface="Noto Sans KR"/>
+                        </a:rPr>
+                        <a:t>수요 목록 확인, 없으면 기본안에서 제외</a:t>
+                      </a:r>
+                    </a:p>
+                  </a:txBody>
+                  <a:tcPr marL="70000" marR="70000" marT="40000" marB="40000" anchor="ctr">
+                    <a:lnL w="6350" cap="flat" cmpd="sng">
+                      <a:solidFill>
+                        <a:srgbClr val="BFBFBF"/>
+                      </a:solidFill>
+                    </a:lnL>
+                    <a:lnR w="6350" cap="flat" cmpd="sng">
+                      <a:solidFill>
+                        <a:srgbClr val="BFBFBF"/>
+                      </a:solidFill>
+                    </a:lnR>
+                    <a:lnT w="6350" cap="flat" cmpd="sng">
+                      <a:solidFill>
+                        <a:srgbClr val="BFBFBF"/>
+                      </a:solidFill>
+                    </a:lnT>
+                    <a:lnB w="6350" cap="flat" cmpd="sng">
+                      <a:solidFill>
+                        <a:srgbClr val="BFBFBF"/>
+                      </a:solidFill>
+                    </a:lnB>
+                    <a:solidFill>
+                      <a:srgbClr val="FFFFFF"/>
+                    </a:solidFill>
+                  </a:tcPr>
+                </a:tc>
+              </a:tr>
+              <a:tr h="600000">
+                <a:tc>
+                  <a:txBody>
+                    <a:bodyPr wrap="square"/>
+                    <a:lstStyle/>
+                    <a:p>
+                      <a:r>
+                        <a:rPr sz="1200" b="1" i="0" lang="ko-KR">
+                          <a:solidFill>
+                            <a:srgbClr val="222222"/>
+                          </a:solidFill>
+                          <a:latin typeface="Noto Sans KR"/>
+                          <a:ea typeface="Noto Sans KR"/>
+                          <a:cs typeface="Noto Sans KR"/>
+                        </a:rPr>
                         <a:t>접수 중인 과제</a:t>
                       </a:r>
                     </a:p>
@@ -22058,7 +22192,7 @@
                     <a:lstStyle/>
                     <a:p>
                       <a:r>
-                        <a:rPr sz="1300" b="0" i="0" lang="ko-KR">
+                        <a:rPr sz="1200" b="0" i="0" lang="ko-KR">
                           <a:solidFill>
                             <a:srgbClr val="222222"/>
                           </a:solidFill>
@@ -22102,7 +22236,7 @@
                     <a:lstStyle/>
                     <a:p>
                       <a:r>
-                        <a:rPr sz="1300" b="0" i="0" lang="ko-KR">
+                        <a:rPr sz="1200" b="0" i="0" lang="ko-KR">
                           <a:solidFill>
                             <a:srgbClr val="222222"/>
                           </a:solidFill>
@@ -22141,14 +22275,14 @@
                   </a:tcPr>
                 </a:tc>
               </a:tr>
-              <a:tr h="680000">
-                <a:tc>
-                  <a:txBody>
-                    <a:bodyPr wrap="square"/>
-                    <a:lstStyle/>
-                    <a:p>
-                      <a:r>
-                        <a:rPr sz="1300" b="1" i="0" lang="ko-KR">
+              <a:tr h="600000">
+                <a:tc>
+                  <a:txBody>
+                    <a:bodyPr wrap="square"/>
+                    <a:lstStyle/>
+                    <a:p>
+                      <a:r>
+                        <a:rPr sz="1200" b="1" i="0" lang="ko-KR">
                           <a:solidFill>
                             <a:srgbClr val="222222"/>
                           </a:solidFill>
@@ -22192,7 +22326,7 @@
                     <a:lstStyle/>
                     <a:p>
                       <a:r>
-                        <a:rPr sz="1300" b="0" i="0" lang="ko-KR">
+                        <a:rPr sz="1200" b="0" i="0" lang="ko-KR">
                           <a:solidFill>
                             <a:srgbClr val="222222"/>
                           </a:solidFill>
@@ -22236,7 +22370,7 @@
                     <a:lstStyle/>
                     <a:p>
                       <a:r>
-                        <a:rPr sz="1300" b="0" i="0" lang="ko-KR">
+                        <a:rPr sz="1200" b="0" i="0" lang="ko-KR">
                           <a:solidFill>
                             <a:srgbClr val="222222"/>
                           </a:solidFill>
@@ -22275,14 +22409,14 @@
                   </a:tcPr>
                 </a:tc>
               </a:tr>
-              <a:tr h="680000">
-                <a:tc>
-                  <a:txBody>
-                    <a:bodyPr wrap="square"/>
-                    <a:lstStyle/>
-                    <a:p>
-                      <a:r>
-                        <a:rPr sz="1300" b="1" i="0" lang="ko-KR">
+              <a:tr h="600000">
+                <a:tc>
+                  <a:txBody>
+                    <a:bodyPr wrap="square"/>
+                    <a:lstStyle/>
+                    <a:p>
+                      <a:r>
+                        <a:rPr sz="1200" b="1" i="0" lang="ko-KR">
                           <a:solidFill>
                             <a:srgbClr val="222222"/>
                           </a:solidFill>
@@ -22326,7 +22460,7 @@
                     <a:lstStyle/>
                     <a:p>
                       <a:r>
-                        <a:rPr sz="1300" b="0" i="0" lang="ko-KR">
+                        <a:rPr sz="1200" b="0" i="0" lang="ko-KR">
                           <a:solidFill>
                             <a:srgbClr val="222222"/>
                           </a:solidFill>
@@ -22370,7 +22504,7 @@
                     <a:lstStyle/>
                     <a:p>
                       <a:r>
-                        <a:rPr sz="1300" b="0" i="0" lang="ko-KR">
+                        <a:rPr sz="1200" b="0" i="0" lang="ko-KR">
                           <a:solidFill>
                             <a:srgbClr val="222222"/>
                           </a:solidFill>
@@ -22409,14 +22543,14 @@
                   </a:tcPr>
                 </a:tc>
               </a:tr>
-              <a:tr h="680000">
-                <a:tc>
-                  <a:txBody>
-                    <a:bodyPr wrap="square"/>
-                    <a:lstStyle/>
-                    <a:p>
-                      <a:r>
-                        <a:rPr sz="1300" b="1" i="0" lang="ko-KR">
+              <a:tr h="600000">
+                <a:tc>
+                  <a:txBody>
+                    <a:bodyPr wrap="square"/>
+                    <a:lstStyle/>
+                    <a:p>
+                      <a:r>
+                        <a:rPr sz="1200" b="1" i="0" lang="ko-KR">
                           <a:solidFill>
                             <a:srgbClr val="222222"/>
                           </a:solidFill>
@@ -22460,7 +22594,7 @@
                     <a:lstStyle/>
                     <a:p>
                       <a:r>
-                        <a:rPr sz="1300" b="0" i="0" lang="ko-KR">
+                        <a:rPr sz="1200" b="0" i="0" lang="ko-KR">
                           <a:solidFill>
                             <a:srgbClr val="222222"/>
                           </a:solidFill>
@@ -22504,7 +22638,7 @@
                     <a:lstStyle/>
                     <a:p>
                       <a:r>
-                        <a:rPr sz="1300" b="0" i="0" lang="ko-KR">
+                        <a:rPr sz="1200" b="0" i="0" lang="ko-KR">
                           <a:solidFill>
                             <a:srgbClr val="222222"/>
                           </a:solidFill>
@@ -22543,14 +22677,14 @@
                   </a:tcPr>
                 </a:tc>
               </a:tr>
-              <a:tr h="680000">
-                <a:tc>
-                  <a:txBody>
-                    <a:bodyPr wrap="square"/>
-                    <a:lstStyle/>
-                    <a:p>
-                      <a:r>
-                        <a:rPr sz="1300" b="1" i="0" lang="ko-KR">
+              <a:tr h="600000">
+                <a:tc>
+                  <a:txBody>
+                    <a:bodyPr wrap="square"/>
+                    <a:lstStyle/>
+                    <a:p>
+                      <a:r>
+                        <a:rPr sz="1200" b="1" i="0" lang="ko-KR">
                           <a:solidFill>
                             <a:srgbClr val="222222"/>
                           </a:solidFill>
@@ -22594,7 +22728,7 @@
                     <a:lstStyle/>
                     <a:p>
                       <a:r>
-                        <a:rPr sz="1300" b="0" i="0" lang="ko-KR">
+                        <a:rPr sz="1200" b="0" i="0" lang="ko-KR">
                           <a:solidFill>
                             <a:srgbClr val="222222"/>
                           </a:solidFill>
@@ -22638,7 +22772,7 @@
                     <a:lstStyle/>
                     <a:p>
                       <a:r>
-                        <a:rPr sz="1300" b="0" i="0" lang="ko-KR">
+                        <a:rPr sz="1200" b="0" i="0" lang="ko-KR">
                           <a:solidFill>
                             <a:srgbClr val="222222"/>
                           </a:solidFill>
